--- a/dist/weeks-포트폴리오제작/포트폴리오제작_04주차_이야기흐름짜기.pptx
+++ b/dist/weeks-포트폴리오제작/포트폴리오제작_04주차_이야기흐름짜기.pptx
@@ -1394,12 +1394,13 @@
 그래서 열다섯 번이 아홉 번이 되었습니다. 1주차에 보여 드린 표를 다시 짰습니다.
 왼쪽부터 보시면, 세 번은 이미 했고요. 오늘이 네 번째입니다. 원래 두 번에 나눠 하려던 이야기 흐름 짜기를 오늘 한 번에 합니다.
 다섯 번째부터 일곱 번째가 실제로 페이지를 만드는 구간입니다. 콘텐츠 구조화, 중간 발표, 그리고 색과 편집.
-여덟 번째와 아홉 번째가 마무리입니다. 편집을 끝내고 온라인에 올리고, 12월 8일에 기말 발표입니다.
-이력서와 피칭은 수업 시간을 따로 못 잡았습니다. 자료로 만들어서 클래스룸에 올려 드리고, 궁금한 건 개별로 받겠습니다.
+여덟 번째와 아홉 번째가 마무리입니다. 편집을 끝내고 온라인에 올린 다음, 12월 8일에 기말 발표입니다.
+여덟 번째 뒤쪽에 발표 연습을 넣었습니다. 기말 발표 바로 앞 회차니까, 만든 걸 가지고 한 번 말해 보고 가시는 게 낫습니다.
+이력서 쓰는 법은 수업 시간을 따로 못 잡았습니다. 자료로 만들어 클래스룸에 올려 드리고, 궁금한 건 개별로 받겠습니다.
 큰 마감은 셋입니다. 오늘 이야기 흐름, 여섯 번째 중간 발표, 아홉 번째 최종.
 횟수가 줄었다고 분량이 준 게 아닙니다. 수업과 수업 사이가 2주니까, 그사이에 하시는 게 늘어난 겁니다.
 [운영 메모]
-1주차에 공지한 15주 표와 마감 일정을 정정하는 장표다. 교수님 확인 전이면 이 장은 띄우지 말 것. 확정되면 클래스룸 공지도 함께 고쳐야 한다.</a:t>
+1주차에 공지한 15주 표와 마감 일정을 정정하는 장표다. 클래스룸 공지도 같은 내용으로 고쳐 둘 것. 8회차 뒤쪽 발표 연습은 20분쯤이면 되고, 전원이 다 못 하면 두세 명만 시범으로 세워도 효과가 있다.</a:t>
             </a:r>
             <a:endParaRPr lang="en-US" dirty="0"/>
           </a:p>
@@ -12237,7 +12238,7 @@
                 <a:ea typeface="Pretendard" pitchFamily="34" charset="-122"/>
                 <a:cs typeface="Pretendard" pitchFamily="34" charset="-120"/>
               </a:rPr>
-              <a:t>9회 — 기말 발표 (12월 8일)</a:t>
+              <a:t>8회 뒤쪽에 발표 연습</a:t>
             </a:r>
             <a:endParaRPr lang="en-US" sz="1150" dirty="0"/>
           </a:p>
@@ -12261,7 +12262,7 @@
                 <a:ea typeface="Pretendard" pitchFamily="34" charset="-122"/>
                 <a:cs typeface="Pretendard" pitchFamily="34" charset="-120"/>
               </a:rPr>
-              <a:t>이력서와 피칭은 자료로</a:t>
+              <a:t>9회 — 기말 발표 (12월 8일)</a:t>
             </a:r>
             <a:endParaRPr lang="en-US" sz="1150" dirty="0"/>
           </a:p>
@@ -12285,7 +12286,7 @@
                 <a:ea typeface="Pretendard" pitchFamily="34" charset="-122"/>
                 <a:cs typeface="Pretendard" pitchFamily="34" charset="-120"/>
               </a:rPr>
-              <a:t>큰 마감은 오늘 · 6회 · 9회</a:t>
+              <a:t>이력서 쓰는 법은 자료로</a:t>
             </a:r>
             <a:endParaRPr lang="en-US" sz="1150" dirty="0"/>
           </a:p>

--- a/dist/weeks-포트폴리오제작/포트폴리오제작_04주차_이야기흐름짜기.pptx
+++ b/dist/weeks-포트폴리오제작/포트폴리오제작_04주차_이야기흐름짜기.pptx
@@ -520,7 +520,7 @@
 포트폴리오제작 네 번째 시간입니다.
 지난 시간에 잘 만든 사례를 살펴보고, 가져올 것 세 가지와 가져오지 않을 것 한 가지를 정했습니다.
 오늘은 그걸 들고 내 것을 짭니다.
-먼저 무엇을 넣을지 고르고, 어떤 순서로 놓을지 정합니다. 그리고 짜 놓은 흐름에서 약한 곳을 찾아 고치는 데까지 오늘 갑니다.
+먼저 무엇을 넣을지 고르고, 어떤 순서로 놓을지 정합니다. 그리고 짜 놓은 흐름에서 단점을 찾아 고치는 데까지 오늘 갑니다.
 원래는 두 번에 나눠서 할 내용입니다. 수업이 격주로 바뀌면서 한 번으로 합쳤어요. 그래서 오늘은 제가 말하는 시간을 줄이고 여러분이 손을 움직이는 시간을 앞뒤로 두 번 넣었습니다.
 오늘 정한 목록이 앞으로의 작업량을 정합니다. 욕심내서 많이 남기면 나중에 하나도 제대로 못 만들어요. 고르는 것보다 빼는 게 더 중요한 시간입니다.
 지난 시간 사례 분석 보고서와 스토리보드 양식을 지금 열어 두세요. 오늘 계속 꺼내 보실 겁니다.
@@ -617,7 +617,7 @@
 쉬셨으면 이어가겠습니다.
 이제 짜 놓은 흐름을 점검합니다.
 원래 이건 다음 시간에 할 내용이었습니다. 격주로 바뀌면서 오늘로 당겼어요. 초안을 만든 그날 바로 점검하는 게 사실 더 낫습니다. 2주 뒤에 보면 자기가 무슨 생각으로 그렇게 놨는지 기억이 안 나거든요.
-매년 반복되는 약점이 세 가지 있습니다. 먼저 그걸 보고, 그다음에 고치는 방법을 보겠습니다.
+매년 반복되는 단점이 세 가지 있습니다. 먼저 그걸 보고, 그다음에 고치는 방법을 보겠습니다.
 [운영 메모]
 원래 5주차 구간이다. 초안을 만든 직후에 점검하는 편이 오히려 효과가 좋다는 점을 말해 주면 합친 것이 손해로 느껴지지 않는다.</a:t>
             </a:r>
@@ -708,7 +708,7 @@
             <a:r>
               <a:rPr lang="en-US" dirty="0"/>
               <a:t>[말할 내용]
-매년 나오는 약점 셋입니다.
+매년 나오는 단점 셋입니다.
 첫째, 다 비슷한 경우. 네 프로젝트가 같은 유형에 같은 구성입니다. 읽는 사람에게는 하나로 기억됩니다. 열심히 한 게 아까워서 비슷한 걸 여러 개 넣으신 거예요.
 고치는 방법은 둘입니다. 하나를 성격이 다른 것으로 바꾸거나, 같은 프로젝트라도 다른 면을 앞세우는 겁니다. 같은 작업이라도 어디를 보여주느냐에 따라 달라 보입니다.
 둘째, 과정이 비어 있는 경우. 이게 제일 많습니다. 문제와 결과는 있는데 그 사이가 없어요. 완성 사진만 있고 어떻게 거기까지 갔는지가 없습니다.
@@ -2639,7 +2639,7 @@
                 <a:ea typeface="Pretendard Light" pitchFamily="34" charset="-122"/>
                 <a:cs typeface="Pretendard Light" pitchFamily="34" charset="-120"/>
               </a:rPr>
-              <a:t>전체 흐름을 짠 다음 약한 곳까지 찾아 고칩니다.</a:t>
+              <a:t>전체 흐름을 짠 다음 단점까지 찾아 고칩니다.</a:t>
             </a:r>
             <a:endParaRPr lang="en-US" sz="1600" dirty="0"/>
           </a:p>
@@ -3244,7 +3244,7 @@
                 <a:ea typeface="Pretendard SemiBold" pitchFamily="34" charset="-122"/>
                 <a:cs typeface="Pretendard SemiBold" pitchFamily="34" charset="-120"/>
               </a:rPr>
-              <a:t>약한 곳을 찾아 고치기</a:t>
+              <a:t>단점을 찾아 고치기</a:t>
             </a:r>
             <a:endParaRPr lang="en-US" sz="4600" dirty="0"/>
           </a:p>
@@ -3311,7 +3311,7 @@
                 <a:ea typeface="Pretendard Light" pitchFamily="34" charset="-122"/>
                 <a:cs typeface="Pretendard Light" pitchFamily="34" charset="-120"/>
               </a:rPr>
-              <a:t>짜 놓고 끝이 아닙니다. 매년 같은 자리에서 약해집니다.</a:t>
+              <a:t>짜 놓고 끝이 아닙니다. 매년 같은 자리에 단점이 생깁니다.</a:t>
             </a:r>
             <a:endParaRPr lang="en-US" sz="1350" dirty="0"/>
           </a:p>
@@ -3602,7 +3602,7 @@
                 <a:ea typeface="Pretendard SemiBold" pitchFamily="34" charset="-122"/>
                 <a:cs typeface="Pretendard SemiBold" pitchFamily="34" charset="-120"/>
               </a:rPr>
-              <a:t>자주 나오는 약점 셋</a:t>
+              <a:t>자주 나오는 단점 셋</a:t>
             </a:r>
             <a:endParaRPr lang="en-US" sz="3000" dirty="0"/>
           </a:p>
@@ -9313,7 +9313,7 @@
                 <a:ea typeface="Pretendard SemiBold" pitchFamily="34" charset="-122"/>
                 <a:cs typeface="Pretendard SemiBold" pitchFamily="34" charset="-120"/>
               </a:rPr>
-              <a:t>일정이 바뀌었습니다 — 아홉 번</a:t>
+              <a:t>학기 일정 — 아홉 번</a:t>
             </a:r>
             <a:endParaRPr lang="en-US" sz="3000" dirty="0"/>
           </a:p>
@@ -9826,7 +9826,7 @@
                 <a:ea typeface="Pretendard" pitchFamily="34" charset="-122"/>
                 <a:cs typeface="Pretendard" pitchFamily="34" charset="-120"/>
               </a:rPr>
-              <a:t>약한 곳을 찾아 고치기</a:t>
+              <a:t>단점을 찾아 고치기</a:t>
             </a:r>
             <a:endParaRPr lang="en-US" sz="1150" dirty="0"/>
           </a:p>
@@ -12216,7 +12216,7 @@
                 <a:ea typeface="Pretendard SemiBold" pitchFamily="34" charset="-122"/>
                 <a:cs typeface="Pretendard SemiBold" pitchFamily="34" charset="-120"/>
               </a:rPr>
-              <a:t>몇 개를 넣나</a:t>
+              <a:t>몇 개를 넣을 것인가</a:t>
             </a:r>
             <a:endParaRPr lang="en-US" sz="3000" dirty="0"/>
           </a:p>

--- a/dist/weeks-포트폴리오제작/포트폴리오제작_04주차_이야기흐름짜기.pptx
+++ b/dist/weeks-포트폴리오제작/포트폴리오제작_04주차_이야기흐름짜기.pptx
@@ -8564,7 +8564,7 @@
                 <a:ea typeface="Pretendard" pitchFamily="34" charset="-122"/>
                 <a:cs typeface="Pretendard" pitchFamily="34" charset="-120"/>
               </a:rPr>
-              <a:t>제출 — 다음 수업 전까지 · 클래스룸 업로드</a:t>
+              <a:t>제출 — 10월 13일(화) 수업 전까지 · 클래스룸 업로드</a:t>
             </a:r>
             <a:endParaRPr lang="en-US" sz="1200" dirty="0"/>
           </a:p>

--- a/dist/weeks-포트폴리오제작/포트폴리오제작_04주차_이야기흐름짜기.pptx
+++ b/dist/weeks-포트폴리오제작/포트폴리오제작_04주차_이야기흐름짜기.pptx
@@ -14851,6 +14851,95 @@
             <a:avLst/>
           </a:prstGeom>
           <a:solidFill>
+            <a:srgbClr val="FFFFFF"/>
+          </a:solidFill>
+          <a:ln w="12700">
+            <a:solidFill>
+              <a:srgbClr val="111111"/>
+            </a:solidFill>
+            <a:prstDash val="solid"/>
+          </a:ln>
+        </p:spPr>
+      </p:sp>
+      <p:sp>
+        <p:nvSpPr>
+          <p:cNvPr id="10" name="Shape 8"/>
+          <p:cNvSpPr/>
+          <p:nvPr/>
+        </p:nvSpPr>
+        <p:spPr>
+          <a:xfrm>
+            <a:off x="640080" y="1627632"/>
+            <a:ext cx="5254600" cy="64008"/>
+          </a:xfrm>
+          <a:prstGeom prst="rect">
+            <a:avLst/>
+          </a:prstGeom>
+          <a:solidFill>
+            <a:srgbClr val="111111"/>
+          </a:solidFill>
+          <a:ln w="12700">
+            <a:solidFill>
+              <a:srgbClr val="111111"/>
+            </a:solidFill>
+            <a:prstDash val="solid"/>
+          </a:ln>
+        </p:spPr>
+      </p:sp>
+      <p:sp>
+        <p:nvSpPr>
+          <p:cNvPr id="11" name="Text 9"/>
+          <p:cNvSpPr/>
+          <p:nvPr/>
+        </p:nvSpPr>
+        <p:spPr>
+          <a:xfrm>
+            <a:off x="1042416" y="1901952"/>
+            <a:ext cx="4449928" cy="365760"/>
+          </a:xfrm>
+          <a:prstGeom prst="rect">
+            <a:avLst/>
+          </a:prstGeom>
+          <a:noFill/>
+          <a:ln/>
+        </p:spPr>
+        <p:txBody>
+          <a:bodyPr wrap="square" lIns="0" tIns="0" rIns="0" bIns="0" rtlCol="0" anchor="ctr"/>
+          <a:lstStyle/>
+          <a:p>
+            <a:pPr indent="0" marL="0">
+              <a:buNone/>
+            </a:pPr>
+            <a:r>
+              <a:rPr lang="en-US" sz="1700" dirty="0">
+                <a:solidFill>
+                  <a:srgbClr val="111111"/>
+                </a:solidFill>
+                <a:latin typeface="Pretendard SemiBold" pitchFamily="34" charset="0"/>
+                <a:ea typeface="Pretendard SemiBold" pitchFamily="34" charset="-122"/>
+                <a:cs typeface="Pretendard SemiBold" pitchFamily="34" charset="-120"/>
+              </a:rPr>
+              <a:t>정해서 놓은 순서</a:t>
+            </a:r>
+            <a:endParaRPr lang="en-US" sz="1700" dirty="0"/>
+          </a:p>
+        </p:txBody>
+      </p:sp>
+      <p:sp>
+        <p:nvSpPr>
+          <p:cNvPr id="12" name="Shape 10"/>
+          <p:cNvSpPr/>
+          <p:nvPr/>
+        </p:nvSpPr>
+        <p:spPr>
+          <a:xfrm>
+            <a:off x="6297016" y="1627632"/>
+            <a:ext cx="5254600" cy="4078224"/>
+          </a:xfrm>
+          <a:prstGeom prst="rect">
+            <a:avLst/>
+          </a:prstGeom>
+          <a:solidFill>
             <a:srgbClr val="F2F2F2"/>
           </a:solidFill>
           <a:ln w="12700">
@@ -14863,13 +14952,13 @@
       </p:sp>
       <p:sp>
         <p:nvSpPr>
-          <p:cNvPr id="10" name="Text 8"/>
-          <p:cNvSpPr/>
-          <p:nvPr/>
-        </p:nvSpPr>
-        <p:spPr>
-          <a:xfrm>
-            <a:off x="1042416" y="1901952"/>
+          <p:cNvPr id="13" name="Text 11"/>
+          <p:cNvSpPr/>
+          <p:nvPr/>
+        </p:nvSpPr>
+        <p:spPr>
+          <a:xfrm>
+            <a:off x="6699352" y="1901952"/>
             <a:ext cx="4449928" cy="365760"/>
           </a:xfrm>
           <a:prstGeom prst="rect">
@@ -14888,13 +14977,13 @@
             <a:r>
               <a:rPr lang="en-US" sz="1700" dirty="0">
                 <a:solidFill>
-                  <a:srgbClr val="111111"/>
+                  <a:srgbClr val="9B9B9B"/>
                 </a:solidFill>
                 <a:latin typeface="Pretendard SemiBold" pitchFamily="34" charset="0"/>
                 <a:ea typeface="Pretendard SemiBold" pitchFamily="34" charset="-122"/>
                 <a:cs typeface="Pretendard SemiBold" pitchFamily="34" charset="-120"/>
               </a:rPr>
-              <a:t>정해서 놓은 순서</a:t>
+              <a:t>그냥 시간순</a:t>
             </a:r>
             <a:endParaRPr lang="en-US" sz="1700" dirty="0"/>
           </a:p>
@@ -14902,71 +14991,7 @@
       </p:sp>
       <p:sp>
         <p:nvSpPr>
-          <p:cNvPr id="11" name="Shape 9"/>
-          <p:cNvSpPr/>
-          <p:nvPr/>
-        </p:nvSpPr>
-        <p:spPr>
-          <a:xfrm>
-            <a:off x="6297016" y="1627632"/>
-            <a:ext cx="5254600" cy="4078224"/>
-          </a:xfrm>
-          <a:prstGeom prst="rect">
-            <a:avLst/>
-          </a:prstGeom>
-          <a:solidFill>
-            <a:srgbClr val="FFFFFF"/>
-          </a:solidFill>
-          <a:ln w="12700">
-            <a:solidFill>
-              <a:srgbClr val="DCDCDC"/>
-            </a:solidFill>
-            <a:prstDash val="solid"/>
-          </a:ln>
-        </p:spPr>
-      </p:sp>
-      <p:sp>
-        <p:nvSpPr>
-          <p:cNvPr id="12" name="Text 10"/>
-          <p:cNvSpPr/>
-          <p:nvPr/>
-        </p:nvSpPr>
-        <p:spPr>
-          <a:xfrm>
-            <a:off x="6699352" y="1901952"/>
-            <a:ext cx="4449928" cy="365760"/>
-          </a:xfrm>
-          <a:prstGeom prst="rect">
-            <a:avLst/>
-          </a:prstGeom>
-          <a:noFill/>
-          <a:ln/>
-        </p:spPr>
-        <p:txBody>
-          <a:bodyPr wrap="square" lIns="0" tIns="0" rIns="0" bIns="0" rtlCol="0" anchor="ctr"/>
-          <a:lstStyle/>
-          <a:p>
-            <a:pPr indent="0" marL="0">
-              <a:buNone/>
-            </a:pPr>
-            <a:r>
-              <a:rPr lang="en-US" sz="1700" dirty="0">
-                <a:solidFill>
-                  <a:srgbClr val="9B9B9B"/>
-                </a:solidFill>
-                <a:latin typeface="Pretendard SemiBold" pitchFamily="34" charset="0"/>
-                <a:ea typeface="Pretendard SemiBold" pitchFamily="34" charset="-122"/>
-                <a:cs typeface="Pretendard SemiBold" pitchFamily="34" charset="-120"/>
-              </a:rPr>
-              <a:t>그냥 시간순</a:t>
-            </a:r>
-            <a:endParaRPr lang="en-US" sz="1700" dirty="0"/>
-          </a:p>
-        </p:txBody>
-      </p:sp>
-      <p:sp>
-        <p:nvSpPr>
-          <p:cNvPr id="13" name="Text 11"/>
+          <p:cNvPr id="14" name="Text 12"/>
           <p:cNvSpPr/>
           <p:nvPr/>
         </p:nvSpPr>
@@ -15005,7 +15030,7 @@
       </p:sp>
       <p:sp>
         <p:nvSpPr>
-          <p:cNvPr id="14" name="Text 12"/>
+          <p:cNvPr id="15" name="Text 13"/>
           <p:cNvSpPr/>
           <p:nvPr/>
         </p:nvSpPr>
@@ -15031,7 +15056,7 @@
               <a:buNone/>
             </a:pPr>
             <a:r>
-              <a:rPr lang="en-US" sz="1150" dirty="0">
+              <a:rPr lang="en-US" sz="1150" b="1" dirty="0">
                 <a:solidFill>
                   <a:srgbClr val="1F1F1F"/>
                 </a:solidFill>
@@ -15047,7 +15072,7 @@
       </p:sp>
       <p:sp>
         <p:nvSpPr>
-          <p:cNvPr id="15" name="Text 13"/>
+          <p:cNvPr id="16" name="Text 14"/>
           <p:cNvSpPr/>
           <p:nvPr/>
         </p:nvSpPr>
@@ -15086,7 +15111,7 @@
       </p:sp>
       <p:sp>
         <p:nvSpPr>
-          <p:cNvPr id="16" name="Text 14"/>
+          <p:cNvPr id="17" name="Text 15"/>
           <p:cNvSpPr/>
           <p:nvPr/>
         </p:nvSpPr>
@@ -15128,7 +15153,7 @@
       </p:sp>
       <p:sp>
         <p:nvSpPr>
-          <p:cNvPr id="17" name="Shape 15"/>
+          <p:cNvPr id="18" name="Shape 16"/>
           <p:cNvSpPr/>
           <p:nvPr/>
         </p:nvSpPr>
@@ -15153,7 +15178,7 @@
       </p:sp>
       <p:sp>
         <p:nvSpPr>
-          <p:cNvPr id="18" name="Shape 16"/>
+          <p:cNvPr id="19" name="Shape 17"/>
           <p:cNvSpPr/>
           <p:nvPr/>
         </p:nvSpPr>
@@ -15178,7 +15203,7 @@
       </p:sp>
       <p:sp>
         <p:nvSpPr>
-          <p:cNvPr id="19" name="Text 17"/>
+          <p:cNvPr id="20" name="Text 18"/>
           <p:cNvSpPr/>
           <p:nvPr/>
         </p:nvSpPr>
@@ -15217,7 +15242,7 @@
       </p:sp>
       <p:sp>
         <p:nvSpPr>
-          <p:cNvPr id="20" name="Text 18"/>
+          <p:cNvPr id="21" name="Text 19"/>
           <p:cNvSpPr/>
           <p:nvPr/>
         </p:nvSpPr>
@@ -15243,7 +15268,7 @@
               <a:buNone/>
             </a:pPr>
             <a:r>
-              <a:rPr lang="en-US" sz="1150" dirty="0">
+              <a:rPr lang="en-US" sz="1150" b="1" dirty="0">
                 <a:solidFill>
                   <a:srgbClr val="1F1F1F"/>
                 </a:solidFill>
@@ -15259,7 +15284,7 @@
       </p:sp>
       <p:sp>
         <p:nvSpPr>
-          <p:cNvPr id="21" name="Text 19"/>
+          <p:cNvPr id="22" name="Text 20"/>
           <p:cNvSpPr/>
           <p:nvPr/>
         </p:nvSpPr>
@@ -15298,7 +15323,7 @@
       </p:sp>
       <p:sp>
         <p:nvSpPr>
-          <p:cNvPr id="22" name="Text 20"/>
+          <p:cNvPr id="23" name="Text 21"/>
           <p:cNvSpPr/>
           <p:nvPr/>
         </p:nvSpPr>
@@ -15340,7 +15365,7 @@
       </p:sp>
       <p:sp>
         <p:nvSpPr>
-          <p:cNvPr id="23" name="Shape 21"/>
+          <p:cNvPr id="24" name="Shape 22"/>
           <p:cNvSpPr/>
           <p:nvPr/>
         </p:nvSpPr>
@@ -15365,7 +15390,7 @@
       </p:sp>
       <p:sp>
         <p:nvSpPr>
-          <p:cNvPr id="24" name="Shape 22"/>
+          <p:cNvPr id="25" name="Shape 23"/>
           <p:cNvSpPr/>
           <p:nvPr/>
         </p:nvSpPr>
@@ -15390,7 +15415,7 @@
       </p:sp>
       <p:sp>
         <p:nvSpPr>
-          <p:cNvPr id="25" name="Text 23"/>
+          <p:cNvPr id="26" name="Text 24"/>
           <p:cNvSpPr/>
           <p:nvPr/>
         </p:nvSpPr>
@@ -15429,7 +15454,7 @@
       </p:sp>
       <p:sp>
         <p:nvSpPr>
-          <p:cNvPr id="26" name="Text 24"/>
+          <p:cNvPr id="27" name="Text 25"/>
           <p:cNvSpPr/>
           <p:nvPr/>
         </p:nvSpPr>
@@ -15455,7 +15480,7 @@
               <a:buNone/>
             </a:pPr>
             <a:r>
-              <a:rPr lang="en-US" sz="1150" dirty="0">
+              <a:rPr lang="en-US" sz="1150" b="1" dirty="0">
                 <a:solidFill>
                   <a:srgbClr val="1F1F1F"/>
                 </a:solidFill>
@@ -15471,7 +15496,7 @@
       </p:sp>
       <p:sp>
         <p:nvSpPr>
-          <p:cNvPr id="27" name="Text 25"/>
+          <p:cNvPr id="28" name="Text 26"/>
           <p:cNvSpPr/>
           <p:nvPr/>
         </p:nvSpPr>
@@ -15510,7 +15535,7 @@
       </p:sp>
       <p:sp>
         <p:nvSpPr>
-          <p:cNvPr id="28" name="Text 26"/>
+          <p:cNvPr id="29" name="Text 27"/>
           <p:cNvSpPr/>
           <p:nvPr/>
         </p:nvSpPr>
@@ -15552,7 +15577,7 @@
       </p:sp>
       <p:sp>
         <p:nvSpPr>
-          <p:cNvPr id="29" name="Shape 27"/>
+          <p:cNvPr id="30" name="Shape 28"/>
           <p:cNvSpPr/>
           <p:nvPr/>
         </p:nvSpPr>
@@ -15577,7 +15602,7 @@
       </p:sp>
       <p:sp>
         <p:nvSpPr>
-          <p:cNvPr id="30" name="Shape 28"/>
+          <p:cNvPr id="31" name="Shape 29"/>
           <p:cNvSpPr/>
           <p:nvPr/>
         </p:nvSpPr>
@@ -15602,7 +15627,7 @@
       </p:sp>
       <p:sp>
         <p:nvSpPr>
-          <p:cNvPr id="31" name="Text 29"/>
+          <p:cNvPr id="32" name="Text 30"/>
           <p:cNvSpPr/>
           <p:nvPr/>
         </p:nvSpPr>
@@ -15641,7 +15666,7 @@
       </p:sp>
       <p:sp>
         <p:nvSpPr>
-          <p:cNvPr id="32" name="Text 30"/>
+          <p:cNvPr id="33" name="Text 31"/>
           <p:cNvSpPr/>
           <p:nvPr/>
         </p:nvSpPr>
@@ -15667,7 +15692,7 @@
               <a:buNone/>
             </a:pPr>
             <a:r>
-              <a:rPr lang="en-US" sz="1150" dirty="0">
+              <a:rPr lang="en-US" sz="1150" b="1" dirty="0">
                 <a:solidFill>
                   <a:srgbClr val="1F1F1F"/>
                 </a:solidFill>
@@ -15683,7 +15708,7 @@
       </p:sp>
       <p:sp>
         <p:nvSpPr>
-          <p:cNvPr id="33" name="Text 31"/>
+          <p:cNvPr id="34" name="Text 32"/>
           <p:cNvSpPr/>
           <p:nvPr/>
         </p:nvSpPr>
@@ -15722,7 +15747,7 @@
       </p:sp>
       <p:sp>
         <p:nvSpPr>
-          <p:cNvPr id="34" name="Text 32"/>
+          <p:cNvPr id="35" name="Text 33"/>
           <p:cNvSpPr/>
           <p:nvPr/>
         </p:nvSpPr>
@@ -15764,7 +15789,7 @@
       </p:sp>
       <p:sp>
         <p:nvSpPr>
-          <p:cNvPr id="35" name="Shape 33"/>
+          <p:cNvPr id="36" name="Shape 34"/>
           <p:cNvSpPr/>
           <p:nvPr/>
         </p:nvSpPr>
@@ -15789,7 +15814,7 @@
       </p:sp>
       <p:sp>
         <p:nvSpPr>
-          <p:cNvPr id="36" name="Shape 34"/>
+          <p:cNvPr id="37" name="Shape 35"/>
           <p:cNvSpPr/>
           <p:nvPr/>
         </p:nvSpPr>
@@ -15814,7 +15839,7 @@
       </p:sp>
       <p:sp>
         <p:nvSpPr>
-          <p:cNvPr id="37" name="Text 35"/>
+          <p:cNvPr id="38" name="Text 36"/>
           <p:cNvSpPr/>
           <p:nvPr/>
         </p:nvSpPr>
@@ -15853,7 +15878,7 @@
       </p:sp>
       <p:sp>
         <p:nvSpPr>
-          <p:cNvPr id="38" name="Text 36"/>
+          <p:cNvPr id="39" name="Text 37"/>
           <p:cNvSpPr/>
           <p:nvPr/>
         </p:nvSpPr>
@@ -15879,7 +15904,7 @@
               <a:buNone/>
             </a:pPr>
             <a:r>
-              <a:rPr lang="en-US" sz="1150" dirty="0">
+              <a:rPr lang="en-US" sz="1150" b="1" dirty="0">
                 <a:solidFill>
                   <a:srgbClr val="1F1F1F"/>
                 </a:solidFill>
@@ -15895,7 +15920,7 @@
       </p:sp>
       <p:sp>
         <p:nvSpPr>
-          <p:cNvPr id="39" name="Text 37"/>
+          <p:cNvPr id="40" name="Text 38"/>
           <p:cNvSpPr/>
           <p:nvPr/>
         </p:nvSpPr>
@@ -15934,7 +15959,7 @@
       </p:sp>
       <p:sp>
         <p:nvSpPr>
-          <p:cNvPr id="40" name="Text 38"/>
+          <p:cNvPr id="41" name="Text 39"/>
           <p:cNvSpPr/>
           <p:nvPr/>
         </p:nvSpPr>
@@ -15976,7 +16001,7 @@
       </p:sp>
       <p:sp>
         <p:nvSpPr>
-          <p:cNvPr id="41" name="Shape 39"/>
+          <p:cNvPr id="42" name="Shape 40"/>
           <p:cNvSpPr/>
           <p:nvPr/>
         </p:nvSpPr>
@@ -16001,7 +16026,7 @@
       </p:sp>
       <p:sp>
         <p:nvSpPr>
-          <p:cNvPr id="42" name="Text 40"/>
+          <p:cNvPr id="43" name="Text 41"/>
           <p:cNvSpPr/>
           <p:nvPr/>
         </p:nvSpPr>
@@ -16040,7 +16065,7 @@
       </p:sp>
       <p:sp>
         <p:nvSpPr>
-          <p:cNvPr id="43" name="Text 41"/>
+          <p:cNvPr id="44" name="Text 42"/>
           <p:cNvSpPr/>
           <p:nvPr/>
         </p:nvSpPr>
